--- a/мини-проект/Классификация фруктов и овощей по изображениям.pptx
+++ b/мини-проект/Классификация фруктов и овощей по изображениям.pptx
@@ -10,6 +10,7 @@
     <p:sldId id="258" r:id="rId4"/>
     <p:sldId id="259" r:id="rId5"/>
     <p:sldId id="260" r:id="rId6"/>
+    <p:sldId id="261" r:id="rId7"/>
   </p:sldIdLst>
   <p:sldSz cx="12192000" cy="6858000"/>
   <p:notesSz cx="6858000" cy="9144000"/>
@@ -286,7 +287,7 @@
           <a:p>
             <a:fld id="{D77C4054-C037-44EF-A8EA-3C2C0EDADA3D}" type="datetimeFigureOut">
               <a:rPr lang="ru-RU" smtClean="0"/>
-              <a:t>26.09.2026</a:t>
+              <a:t>29.09.2026</a:t>
             </a:fld>
             <a:endParaRPr lang="ru-RU"/>
           </a:p>
@@ -553,7 +554,7 @@
           <a:p>
             <a:fld id="{D77C4054-C037-44EF-A8EA-3C2C0EDADA3D}" type="datetimeFigureOut">
               <a:rPr lang="ru-RU" smtClean="0"/>
-              <a:t>26.09.2026</a:t>
+              <a:t>29.09.2026</a:t>
             </a:fld>
             <a:endParaRPr lang="ru-RU"/>
           </a:p>
@@ -784,7 +785,7 @@
           <a:p>
             <a:fld id="{D77C4054-C037-44EF-A8EA-3C2C0EDADA3D}" type="datetimeFigureOut">
               <a:rPr lang="ru-RU" smtClean="0"/>
-              <a:t>26.09.2026</a:t>
+              <a:t>29.09.2026</a:t>
             </a:fld>
             <a:endParaRPr lang="ru-RU"/>
           </a:p>
@@ -1094,7 +1095,7 @@
           <a:p>
             <a:fld id="{D77C4054-C037-44EF-A8EA-3C2C0EDADA3D}" type="datetimeFigureOut">
               <a:rPr lang="ru-RU" smtClean="0"/>
-              <a:t>26.09.2026</a:t>
+              <a:t>29.09.2026</a:t>
             </a:fld>
             <a:endParaRPr lang="ru-RU"/>
           </a:p>
@@ -1567,7 +1568,7 @@
           <a:p>
             <a:fld id="{D77C4054-C037-44EF-A8EA-3C2C0EDADA3D}" type="datetimeFigureOut">
               <a:rPr lang="ru-RU" smtClean="0"/>
-              <a:t>26.09.2026</a:t>
+              <a:t>29.09.2026</a:t>
             </a:fld>
             <a:endParaRPr lang="ru-RU"/>
           </a:p>
@@ -2114,7 +2115,7 @@
           <a:p>
             <a:fld id="{D77C4054-C037-44EF-A8EA-3C2C0EDADA3D}" type="datetimeFigureOut">
               <a:rPr lang="ru-RU" smtClean="0"/>
-              <a:t>26.09.2026</a:t>
+              <a:t>29.09.2026</a:t>
             </a:fld>
             <a:endParaRPr lang="ru-RU"/>
           </a:p>
@@ -2888,7 +2889,7 @@
           <a:p>
             <a:fld id="{D77C4054-C037-44EF-A8EA-3C2C0EDADA3D}" type="datetimeFigureOut">
               <a:rPr lang="ru-RU" smtClean="0"/>
-              <a:t>26.09.2026</a:t>
+              <a:t>29.09.2026</a:t>
             </a:fld>
             <a:endParaRPr lang="ru-RU"/>
           </a:p>
@@ -3063,7 +3064,7 @@
           <a:p>
             <a:fld id="{D77C4054-C037-44EF-A8EA-3C2C0EDADA3D}" type="datetimeFigureOut">
               <a:rPr lang="ru-RU" smtClean="0"/>
-              <a:t>26.09.2026</a:t>
+              <a:t>29.09.2026</a:t>
             </a:fld>
             <a:endParaRPr lang="ru-RU"/>
           </a:p>
@@ -3286,7 +3287,7 @@
           <a:p>
             <a:fld id="{D77C4054-C037-44EF-A8EA-3C2C0EDADA3D}" type="datetimeFigureOut">
               <a:rPr lang="ru-RU" smtClean="0"/>
-              <a:t>26.09.2026</a:t>
+              <a:t>29.09.2026</a:t>
             </a:fld>
             <a:endParaRPr lang="ru-RU"/>
           </a:p>
@@ -3466,7 +3467,7 @@
           <a:p>
             <a:fld id="{D77C4054-C037-44EF-A8EA-3C2C0EDADA3D}" type="datetimeFigureOut">
               <a:rPr lang="ru-RU" smtClean="0"/>
-              <a:t>26.09.2026</a:t>
+              <a:t>29.09.2026</a:t>
             </a:fld>
             <a:endParaRPr lang="ru-RU"/>
           </a:p>
@@ -3755,7 +3756,7 @@
           <a:p>
             <a:fld id="{D77C4054-C037-44EF-A8EA-3C2C0EDADA3D}" type="datetimeFigureOut">
               <a:rPr lang="ru-RU" smtClean="0"/>
-              <a:t>26.09.2026</a:t>
+              <a:t>29.09.2026</a:t>
             </a:fld>
             <a:endParaRPr lang="ru-RU"/>
           </a:p>
@@ -3997,7 +3998,7 @@
           <a:p>
             <a:fld id="{D77C4054-C037-44EF-A8EA-3C2C0EDADA3D}" type="datetimeFigureOut">
               <a:rPr lang="ru-RU" smtClean="0"/>
-              <a:t>26.09.2026</a:t>
+              <a:t>29.09.2026</a:t>
             </a:fld>
             <a:endParaRPr lang="ru-RU"/>
           </a:p>
@@ -4376,7 +4377,7 @@
           <a:p>
             <a:fld id="{D77C4054-C037-44EF-A8EA-3C2C0EDADA3D}" type="datetimeFigureOut">
               <a:rPr lang="ru-RU" smtClean="0"/>
-              <a:t>26.09.2026</a:t>
+              <a:t>29.09.2026</a:t>
             </a:fld>
             <a:endParaRPr lang="ru-RU"/>
           </a:p>
@@ -4494,7 +4495,7 @@
           <a:p>
             <a:fld id="{D77C4054-C037-44EF-A8EA-3C2C0EDADA3D}" type="datetimeFigureOut">
               <a:rPr lang="ru-RU" smtClean="0"/>
-              <a:t>26.09.2026</a:t>
+              <a:t>29.09.2026</a:t>
             </a:fld>
             <a:endParaRPr lang="ru-RU"/>
           </a:p>
@@ -4589,7 +4590,7 @@
           <a:p>
             <a:fld id="{D77C4054-C037-44EF-A8EA-3C2C0EDADA3D}" type="datetimeFigureOut">
               <a:rPr lang="ru-RU" smtClean="0"/>
-              <a:t>26.09.2026</a:t>
+              <a:t>29.09.2026</a:t>
             </a:fld>
             <a:endParaRPr lang="ru-RU"/>
           </a:p>
@@ -4838,7 +4839,7 @@
           <a:p>
             <a:fld id="{D77C4054-C037-44EF-A8EA-3C2C0EDADA3D}" type="datetimeFigureOut">
               <a:rPr lang="ru-RU" smtClean="0"/>
-              <a:t>26.09.2026</a:t>
+              <a:t>29.09.2026</a:t>
             </a:fld>
             <a:endParaRPr lang="ru-RU"/>
           </a:p>
@@ -5095,7 +5096,7 @@
           <a:p>
             <a:fld id="{D77C4054-C037-44EF-A8EA-3C2C0EDADA3D}" type="datetimeFigureOut">
               <a:rPr lang="ru-RU" smtClean="0"/>
-              <a:t>26.09.2026</a:t>
+              <a:t>29.09.2026</a:t>
             </a:fld>
             <a:endParaRPr lang="ru-RU"/>
           </a:p>
@@ -5338,7 +5339,7 @@
           <a:p>
             <a:fld id="{D77C4054-C037-44EF-A8EA-3C2C0EDADA3D}" type="datetimeFigureOut">
               <a:rPr lang="ru-RU" smtClean="0"/>
-              <a:t>26.09.2026</a:t>
+              <a:t>29.09.2026</a:t>
             </a:fld>
             <a:endParaRPr lang="ru-RU"/>
           </a:p>
@@ -6476,6 +6477,132 @@
 </p:sld>
 </file>
 
+<file path=ppt/slides/slide6.xml><?xml version="1.0" encoding="utf-8"?>
+<p:sld xmlns:a="http://schemas.openxmlformats.org/drawingml/2006/main" xmlns:r="http://schemas.openxmlformats.org/officeDocument/2006/relationships" xmlns:p="http://schemas.openxmlformats.org/presentationml/2006/main">
+  <p:cSld>
+    <p:spTree>
+      <p:nvGrpSpPr>
+        <p:cNvPr id="1" name=""/>
+        <p:cNvGrpSpPr/>
+        <p:nvPr/>
+      </p:nvGrpSpPr>
+      <p:grpSpPr>
+        <a:xfrm>
+          <a:off x="0" y="0"/>
+          <a:ext cx="0" cy="0"/>
+          <a:chOff x="0" y="0"/>
+          <a:chExt cx="0" cy="0"/>
+        </a:xfrm>
+      </p:grpSpPr>
+      <p:sp>
+        <p:nvSpPr>
+          <p:cNvPr id="2" name="Заголовок 1">
+            <a:extLst>
+              <a:ext uri="{FF2B5EF4-FFF2-40B4-BE49-F238E27FC236}">
+                <a16:creationId xmlns:a16="http://schemas.microsoft.com/office/drawing/2014/main" id="{F5CFCE5B-9CAF-8BA7-2EFD-3B229AFCADEF}"/>
+              </a:ext>
+            </a:extLst>
+          </p:cNvPr>
+          <p:cNvSpPr>
+            <a:spLocks noGrp="1"/>
+          </p:cNvSpPr>
+          <p:nvPr>
+            <p:ph type="title"/>
+          </p:nvPr>
+        </p:nvSpPr>
+        <p:spPr/>
+        <p:txBody>
+          <a:bodyPr/>
+          <a:lstStyle/>
+          <a:p>
+            <a:r>
+              <a:rPr lang="ru-RU" dirty="0"/>
+              <a:t>Ожидаемые результаты</a:t>
+            </a:r>
+          </a:p>
+        </p:txBody>
+      </p:sp>
+      <p:sp>
+        <p:nvSpPr>
+          <p:cNvPr id="3" name="Объект 2">
+            <a:extLst>
+              <a:ext uri="{FF2B5EF4-FFF2-40B4-BE49-F238E27FC236}">
+                <a16:creationId xmlns:a16="http://schemas.microsoft.com/office/drawing/2014/main" id="{242C25A4-FDF0-96B7-3672-0C27221363CF}"/>
+              </a:ext>
+            </a:extLst>
+          </p:cNvPr>
+          <p:cNvSpPr>
+            <a:spLocks noGrp="1"/>
+          </p:cNvSpPr>
+          <p:nvPr>
+            <p:ph idx="1"/>
+          </p:nvPr>
+        </p:nvSpPr>
+        <p:spPr/>
+        <p:txBody>
+          <a:bodyPr/>
+          <a:lstStyle/>
+          <a:p>
+            <a:r>
+              <a:rPr lang="ru-RU" b="1" dirty="0"/>
+              <a:t>Сравнительный анализ</a:t>
+            </a:r>
+            <a:r>
+              <a:rPr lang="ru-RU" dirty="0"/>
+              <a:t> двух подходов: классического </a:t>
+            </a:r>
+            <a:r>
+              <a:rPr lang="en-US" dirty="0"/>
+              <a:t>ML </a:t>
+            </a:r>
+            <a:r>
+              <a:rPr lang="ru-RU" dirty="0"/>
+              <a:t>и сверточных нейронных сетей	</a:t>
+            </a:r>
+          </a:p>
+          <a:p>
+            <a:pPr marL="0" indent="0">
+              <a:buNone/>
+            </a:pPr>
+            <a:endParaRPr lang="ru-RU" dirty="0"/>
+          </a:p>
+          <a:p>
+            <a:r>
+              <a:rPr lang="ru-RU" dirty="0"/>
+              <a:t>Работающая </a:t>
+            </a:r>
+            <a:r>
+              <a:rPr lang="ru-RU" b="1" dirty="0"/>
+              <a:t>модель классификации</a:t>
+            </a:r>
+            <a:r>
+              <a:rPr lang="ru-RU" dirty="0"/>
+              <a:t>, распознающая 36 классов фруктов и овощей с высокой точностью (</a:t>
+            </a:r>
+            <a:r>
+              <a:rPr lang="en-US" dirty="0"/>
+              <a:t>&gt;80%</a:t>
+            </a:r>
+            <a:r>
+              <a:rPr lang="ru-RU" dirty="0"/>
+              <a:t>)</a:t>
+            </a:r>
+          </a:p>
+        </p:txBody>
+      </p:sp>
+    </p:spTree>
+    <p:extLst>
+      <p:ext uri="{BB962C8B-B14F-4D97-AF65-F5344CB8AC3E}">
+        <p14:creationId xmlns:p14="http://schemas.microsoft.com/office/powerpoint/2010/main" val="1078935938"/>
+      </p:ext>
+    </p:extLst>
+  </p:cSld>
+  <p:clrMapOvr>
+    <a:masterClrMapping/>
+  </p:clrMapOvr>
+</p:sld>
+</file>
+
 <file path=ppt/theme/theme1.xml><?xml version="1.0" encoding="utf-8"?>
 <a:theme xmlns:a="http://schemas.openxmlformats.org/drawingml/2006/main" name="След самолета">
   <a:themeElements>
